--- a/slides/presentation.pptx
+++ b/slides/presentation.pptx
@@ -4,16 +4,17 @@
   <p:sldMasterIdLst>
     <p:sldMasterId id="2147483648" r:id="rId1"/>
   </p:sldMasterIdLst>
+  <p:notesMasterIdLst>
+    <p:notesMasterId r:id="rId8"/>
+  </p:notesMasterIdLst>
   <p:sldIdLst>
-    <p:sldId id="256" r:id="rId2"/>
-    <p:sldId id="257" r:id="rId3"/>
-    <p:sldId id="258" r:id="rId4"/>
-    <p:sldId id="259" r:id="rId5"/>
-    <p:sldId id="260" r:id="rId6"/>
+    <p:sldId id="261" r:id="rId2"/>
+    <p:sldId id="256" r:id="rId3"/>
+    <p:sldId id="257" r:id="rId4"/>
+    <p:sldId id="258" r:id="rId5"/>
+    <p:sldId id="259" r:id="rId6"/>
+    <p:sldId id="260" r:id="rId7"/>
   </p:sldIdLst>
-  <p:notesMasterIdLst>
-    <p:notesMasterId r:id="rId7"/>
-  </p:notesMasterIdLst>
   <p:sldSz cx="12192000" cy="6858000"/>
   <p:notesSz cx="6858000" cy="12192000"/>
   <p:defaultTextStyle>
@@ -108,6 +109,11 @@
       </a:defRPr>
     </a:lvl9pPr>
   </p:defaultTextStyle>
+  <p:extLst>
+    <p:ext uri="{EFAFB233-063F-42B5-8137-9DF3F51BA10A}">
+      <p15:sldGuideLst xmlns:p15="http://schemas.microsoft.com/office/powerpoint/2012/main"/>
+    </p:ext>
+  </p:extLst>
 </p:presentation>
 </file>
 
@@ -133,234 +139,10 @@
           <a:chExt cx="0" cy="0"/>
         </a:xfrm>
       </p:grpSpPr>
-      <p:sp>
-        <p:nvSpPr>
-          <p:cNvPr id="2" name="Header Placeholder 1"/>
-          <p:cNvSpPr>
-            <a:spLocks noGrp="1"/>
-          </p:cNvSpPr>
-          <p:nvPr>
-            <p:ph type="hdr" sz="quarter"/>
-          </p:nvPr>
-        </p:nvSpPr>
-        <p:spPr>
-          <a:xfrm>
-            <a:off x="0" y="0"/>
-            <a:ext cx="2971800" cy="458788"/>
-          </a:xfrm>
-          <a:prstGeom prst="rect">
-            <a:avLst/>
-          </a:prstGeom>
-        </p:spPr>
-        <p:txBody>
-          <a:bodyPr vert="horz" lIns="91440" tIns="45720" rIns="91440" bIns="45720" rtlCol="0"/>
-          <a:lstStyle>
-            <a:lvl1pPr algn="l">
-              <a:defRPr sz="1200"/>
-            </a:lvl1pPr>
-          </a:lstStyle>
-          <a:p>
-            <a:endParaRPr lang="en-US"/>
-          </a:p>
-        </p:txBody>
-      </p:sp>
-      <p:sp>
-        <p:nvSpPr>
-          <p:cNvPr id="3" name="Date Placeholder 2"/>
-          <p:cNvSpPr>
-            <a:spLocks noGrp="1"/>
-          </p:cNvSpPr>
-          <p:nvPr>
-            <p:ph type="dt" idx="1"/>
-          </p:nvPr>
-        </p:nvSpPr>
-        <p:spPr>
-          <a:xfrm>
-            <a:off x="3884613" y="0"/>
-            <a:ext cx="2971800" cy="458788"/>
-          </a:xfrm>
-          <a:prstGeom prst="rect">
-            <a:avLst/>
-          </a:prstGeom>
-        </p:spPr>
-        <p:txBody>
-          <a:bodyPr vert="horz" lIns="91440" tIns="45720" rIns="91440" bIns="45720" rtlCol="0"/>
-          <a:lstStyle>
-            <a:lvl1pPr algn="r">
-              <a:defRPr sz="1200"/>
-            </a:lvl1pPr>
-          </a:lstStyle>
-          <a:p>
-            <a:fld id="{5282F153-3F37-0F45-9E97-73ACFA13230C}" type="datetimeFigureOut">
-              <a:rPr lang="en-US"/>
-              <a:t>7/23/19</a:t>
-            </a:fld>
-            <a:endParaRPr lang="en-US"/>
-          </a:p>
-        </p:txBody>
-      </p:sp>
-      <p:sp>
-        <p:nvSpPr>
-          <p:cNvPr id="4" name="Slide Image Placeholder 3"/>
-          <p:cNvSpPr>
-            <a:spLocks noGrp="1" noRot="1" noChangeAspect="1"/>
-          </p:cNvSpPr>
-          <p:nvPr>
-            <p:ph type="sldImg" idx="2"/>
-          </p:nvPr>
-        </p:nvSpPr>
-        <p:spPr>
-          <a:xfrm>
-            <a:off x="685800" y="1143000"/>
-            <a:ext cx="5486400" cy="3086100"/>
-          </a:xfrm>
-          <a:prstGeom prst="rect">
-            <a:avLst/>
-          </a:prstGeom>
-          <a:noFill/>
-          <a:ln w="12700">
-            <a:solidFill>
-              <a:prstClr val="black"/>
-            </a:solidFill>
-          </a:ln>
-        </p:spPr>
-        <p:txBody>
-          <a:bodyPr vert="horz" lIns="91440" tIns="45720" rIns="91440" bIns="45720" rtlCol="0" anchor="ctr"/>
-          <a:lstStyle/>
-          <a:p>
-            <a:endParaRPr lang="en-US"/>
-          </a:p>
-        </p:txBody>
-      </p:sp>
-      <p:sp>
-        <p:nvSpPr>
-          <p:cNvPr id="5" name="Notes Placeholder 4"/>
-          <p:cNvSpPr>
-            <a:spLocks noGrp="1"/>
-          </p:cNvSpPr>
-          <p:nvPr>
-            <p:ph type="body" sz="quarter" idx="3"/>
-          </p:nvPr>
-        </p:nvSpPr>
-        <p:spPr>
-          <a:xfrm>
-            <a:off x="685800" y="4400550"/>
-            <a:ext cx="5486400" cy="3600450"/>
-          </a:xfrm>
-          <a:prstGeom prst="rect">
-            <a:avLst/>
-          </a:prstGeom>
-        </p:spPr>
-        <p:txBody>
-          <a:bodyPr vert="horz" lIns="91440" tIns="45720" rIns="91440" bIns="45720" rtlCol="0"/>
-          <a:lstStyle/>
-          <a:p>
-            <a:pPr lvl="0"/>
-            <a:r>
-              <a:rPr lang="en-US"/>
-              <a:t>Click to edit Master text styles</a:t>
-            </a:r>
-          </a:p>
-          <a:p>
-            <a:pPr lvl="1"/>
-            <a:r>
-              <a:rPr lang="en-US"/>
-              <a:t>Second level</a:t>
-            </a:r>
-          </a:p>
-          <a:p>
-            <a:pPr lvl="2"/>
-            <a:r>
-              <a:rPr lang="en-US"/>
-              <a:t>Third level</a:t>
-            </a:r>
-          </a:p>
-          <a:p>
-            <a:pPr lvl="3"/>
-            <a:r>
-              <a:rPr lang="en-US"/>
-              <a:t>Fourth level</a:t>
-            </a:r>
-          </a:p>
-          <a:p>
-            <a:pPr lvl="4"/>
-            <a:r>
-              <a:rPr lang="en-US"/>
-              <a:t>Fifth level</a:t>
-            </a:r>
-          </a:p>
-        </p:txBody>
-      </p:sp>
-      <p:sp>
-        <p:nvSpPr>
-          <p:cNvPr id="6" name="Footer Placeholder 5"/>
-          <p:cNvSpPr>
-            <a:spLocks noGrp="1"/>
-          </p:cNvSpPr>
-          <p:nvPr>
-            <p:ph type="ftr" sz="quarter" idx="4"/>
-          </p:nvPr>
-        </p:nvSpPr>
-        <p:spPr>
-          <a:xfrm>
-            <a:off x="0" y="8685213"/>
-            <a:ext cx="2971800" cy="458787"/>
-          </a:xfrm>
-          <a:prstGeom prst="rect">
-            <a:avLst/>
-          </a:prstGeom>
-        </p:spPr>
-        <p:txBody>
-          <a:bodyPr vert="horz" lIns="91440" tIns="45720" rIns="91440" bIns="45720" rtlCol="0" anchor="b"/>
-          <a:lstStyle>
-            <a:lvl1pPr algn="l">
-              <a:defRPr sz="1200"/>
-            </a:lvl1pPr>
-          </a:lstStyle>
-          <a:p>
-            <a:endParaRPr lang="en-US"/>
-          </a:p>
-        </p:txBody>
-      </p:sp>
-      <p:sp>
-        <p:nvSpPr>
-          <p:cNvPr id="7" name="Slide Number Placeholder 6"/>
-          <p:cNvSpPr>
-            <a:spLocks noGrp="1"/>
-          </p:cNvSpPr>
-          <p:nvPr>
-            <p:ph type="sldNum" sz="quarter" idx="5"/>
-          </p:nvPr>
-        </p:nvSpPr>
-        <p:spPr>
-          <a:xfrm>
-            <a:off x="3884613" y="8685213"/>
-            <a:ext cx="2971800" cy="458787"/>
-          </a:xfrm>
-          <a:prstGeom prst="rect">
-            <a:avLst/>
-          </a:prstGeom>
-        </p:spPr>
-        <p:txBody>
-          <a:bodyPr vert="horz" lIns="91440" tIns="45720" rIns="91440" bIns="45720" rtlCol="0" anchor="b"/>
-          <a:lstStyle>
-            <a:lvl1pPr algn="r">
-              <a:defRPr sz="1200"/>
-            </a:lvl1pPr>
-          </a:lstStyle>
-          <a:p>
-            <a:fld id="{CE5E9CC1-C706-0F49-92D6-E571CC5EEA8F}" type="slidenum">
-              <a:rPr lang="en-US"/>
-              <a:t>‹#›</a:t>
-            </a:fld>
-            <a:endParaRPr lang="en-US"/>
-          </a:p>
-        </p:txBody>
-      </p:sp>
     </p:spTree>
     <p:extLst>
       <p:ext uri="{BB962C8B-B14F-4D97-AF65-F5344CB8AC3E}">
-        <p14:creationId xmlns:p14="http://schemas.microsoft.com/office/powerpoint/2010/main" val="1024086991"/>
+        <p14:creationId xmlns:p14="http://schemas.microsoft.com/office/powerpoint/2010/main" val="151604127"/>
       </p:ext>
     </p:extLst>
   </p:cSld>
@@ -504,10 +286,6 @@
           <a:bodyPr/>
           <a:lstStyle/>
           <a:p>
-            <a:r>
-              <a:rPr lang="en-US" dirty="0"/>
-              <a:t/>
-            </a:r>
             <a:endParaRPr lang="en-US" dirty="0"/>
           </a:p>
         </p:txBody>
@@ -529,7 +307,7 @@
           <a:p>
             <a:fld id="{F7021451-1387-4CA6-816F-3879F97B5CBC}" type="slidenum">
               <a:rPr lang="en-US"/>
-              <a:t>1</a:t>
+              <a:t>2</a:t>
             </a:fld>
             <a:endParaRPr lang="en-US"/>
           </a:p>
@@ -592,10 +370,6 @@
           <a:bodyPr/>
           <a:lstStyle/>
           <a:p>
-            <a:r>
-              <a:rPr lang="en-US" dirty="0"/>
-              <a:t/>
-            </a:r>
             <a:endParaRPr lang="en-US" dirty="0"/>
           </a:p>
         </p:txBody>
@@ -617,7 +391,7 @@
           <a:p>
             <a:fld id="{F7021451-1387-4CA6-816F-3879F97B5CBC}" type="slidenum">
               <a:rPr lang="en-US"/>
-              <a:t>2</a:t>
+              <a:t>3</a:t>
             </a:fld>
             <a:endParaRPr lang="en-US"/>
           </a:p>
@@ -680,10 +454,6 @@
           <a:bodyPr/>
           <a:lstStyle/>
           <a:p>
-            <a:r>
-              <a:rPr lang="en-US" dirty="0"/>
-              <a:t/>
-            </a:r>
             <a:endParaRPr lang="en-US" dirty="0"/>
           </a:p>
         </p:txBody>
@@ -705,7 +475,7 @@
           <a:p>
             <a:fld id="{F7021451-1387-4CA6-816F-3879F97B5CBC}" type="slidenum">
               <a:rPr lang="en-US"/>
-              <a:t>3</a:t>
+              <a:t>4</a:t>
             </a:fld>
             <a:endParaRPr lang="en-US"/>
           </a:p>
@@ -768,10 +538,6 @@
           <a:bodyPr/>
           <a:lstStyle/>
           <a:p>
-            <a:r>
-              <a:rPr lang="en-US" dirty="0"/>
-              <a:t/>
-            </a:r>
             <a:endParaRPr lang="en-US" dirty="0"/>
           </a:p>
         </p:txBody>
@@ -793,7 +559,7 @@
           <a:p>
             <a:fld id="{F7021451-1387-4CA6-816F-3879F97B5CBC}" type="slidenum">
               <a:rPr lang="en-US"/>
-              <a:t>4</a:t>
+              <a:t>5</a:t>
             </a:fld>
             <a:endParaRPr lang="en-US"/>
           </a:p>
@@ -856,10 +622,6 @@
           <a:bodyPr/>
           <a:lstStyle/>
           <a:p>
-            <a:r>
-              <a:rPr lang="en-US" dirty="0"/>
-              <a:t/>
-            </a:r>
             <a:endParaRPr lang="en-US" dirty="0"/>
           </a:p>
         </p:txBody>
@@ -881,7 +643,7 @@
           <a:p>
             <a:fld id="{F7021451-1387-4CA6-816F-3879F97B5CBC}" type="slidenum">
               <a:rPr lang="en-US"/>
-              <a:t>5</a:t>
+              <a:t>6</a:t>
             </a:fld>
             <a:endParaRPr lang="en-US"/>
           </a:p>
@@ -933,6 +695,11 @@
 <file path=ppt/slideMasters/slideMaster1.xml><?xml version="1.0" encoding="utf-8"?>
 <p:sldMaster xmlns:a="http://schemas.openxmlformats.org/drawingml/2006/main" xmlns:r="http://schemas.openxmlformats.org/officeDocument/2006/relationships" xmlns:p="http://schemas.openxmlformats.org/presentationml/2006/main">
   <p:cSld>
+    <p:bg>
+      <p:bgRef idx="1001">
+        <a:schemeClr val="bg1"/>
+      </p:bgRef>
+    </p:bg>
     <p:spTree>
       <p:nvGrpSpPr>
         <p:cNvPr id="1" name=""/>
@@ -1209,12 +976,165 @@
 
 <file path=ppt/slides/slide1.xml><?xml version="1.0" encoding="utf-8"?>
 <p:sld xmlns:a="http://schemas.openxmlformats.org/drawingml/2006/main" xmlns:r="http://schemas.openxmlformats.org/officeDocument/2006/relationships" xmlns:p="http://schemas.openxmlformats.org/presentationml/2006/main">
+  <p:cSld>
+    <p:spTree>
+      <p:nvGrpSpPr>
+        <p:cNvPr id="1" name=""/>
+        <p:cNvGrpSpPr/>
+        <p:nvPr/>
+      </p:nvGrpSpPr>
+      <p:grpSpPr>
+        <a:xfrm>
+          <a:off x="0" y="0"/>
+          <a:ext cx="0" cy="0"/>
+          <a:chOff x="0" y="0"/>
+          <a:chExt cx="0" cy="0"/>
+        </a:xfrm>
+      </p:grpSpPr>
+      <p:sp>
+        <p:nvSpPr>
+          <p:cNvPr id="2" name="Shape 1">
+            <a:extLst>
+              <a:ext uri="{FF2B5EF4-FFF2-40B4-BE49-F238E27FC236}">
+                <a16:creationId xmlns:a16="http://schemas.microsoft.com/office/drawing/2014/main" id="{80483030-8C3E-49B4-A814-6DFE2AE4F81A}"/>
+              </a:ext>
+            </a:extLst>
+          </p:cNvPr>
+          <p:cNvSpPr/>
+          <p:nvPr/>
+        </p:nvSpPr>
+        <p:spPr>
+          <a:xfrm>
+            <a:off x="0" y="-18473"/>
+            <a:ext cx="12191695" cy="201168"/>
+          </a:xfrm>
+          <a:prstGeom prst="rect">
+            <a:avLst/>
+          </a:prstGeom>
+          <a:solidFill>
+            <a:srgbClr val="0D5C63"/>
+          </a:solidFill>
+          <a:ln w="12700">
+            <a:solidFill>
+              <a:srgbClr val="0D5C63"/>
+            </a:solidFill>
+            <a:prstDash val="solid"/>
+          </a:ln>
+        </p:spPr>
+      </p:sp>
+      <p:sp>
+        <p:nvSpPr>
+          <p:cNvPr id="4" name="TextBox 3">
+            <a:extLst>
+              <a:ext uri="{FF2B5EF4-FFF2-40B4-BE49-F238E27FC236}">
+                <a16:creationId xmlns:a16="http://schemas.microsoft.com/office/drawing/2014/main" id="{D05B8435-27DB-47EA-9BF5-25EDD6E2BB4A}"/>
+              </a:ext>
+            </a:extLst>
+          </p:cNvPr>
+          <p:cNvSpPr txBox="1"/>
+          <p:nvPr/>
+        </p:nvSpPr>
+        <p:spPr>
+          <a:xfrm>
+            <a:off x="3777671" y="2426736"/>
+            <a:ext cx="5992091" cy="1015663"/>
+          </a:xfrm>
+          <a:prstGeom prst="rect">
+            <a:avLst/>
+          </a:prstGeom>
+          <a:noFill/>
+          <a:effectLst>
+            <a:reflection blurRad="6350" stA="50000" endA="300" endPos="55000" dir="5400000" sy="-100000" algn="bl" rotWithShape="0"/>
+          </a:effectLst>
+        </p:spPr>
+        <p:txBody>
+          <a:bodyPr wrap="square">
+            <a:spAutoFit/>
+          </a:bodyPr>
+          <a:lstStyle/>
+          <a:p>
+            <a:r>
+              <a:rPr lang="en-US" sz="6000" b="1" dirty="0"/>
+              <a:t>CareerCompass AI</a:t>
+            </a:r>
+          </a:p>
+        </p:txBody>
+      </p:sp>
+      <p:sp>
+        <p:nvSpPr>
+          <p:cNvPr id="5" name="TextBox 4">
+            <a:extLst>
+              <a:ext uri="{FF2B5EF4-FFF2-40B4-BE49-F238E27FC236}">
+                <a16:creationId xmlns:a16="http://schemas.microsoft.com/office/drawing/2014/main" id="{54A8647A-CC99-4D82-950E-E79CA84D856A}"/>
+              </a:ext>
+            </a:extLst>
+          </p:cNvPr>
+          <p:cNvSpPr txBox="1"/>
+          <p:nvPr/>
+        </p:nvSpPr>
+        <p:spPr>
+          <a:xfrm>
+            <a:off x="4045527" y="5440219"/>
+            <a:ext cx="4729018" cy="1200329"/>
+          </a:xfrm>
+          <a:prstGeom prst="rect">
+            <a:avLst/>
+          </a:prstGeom>
+          <a:noFill/>
+        </p:spPr>
+        <p:txBody>
+          <a:bodyPr wrap="square" rtlCol="0">
+            <a:spAutoFit/>
+          </a:bodyPr>
+          <a:lstStyle/>
+          <a:p>
+            <a:r>
+              <a:rPr lang="en-US" dirty="0"/>
+              <a:t>Represented By:</a:t>
+            </a:r>
+          </a:p>
+          <a:p>
+            <a:r>
+              <a:rPr lang="en-US" dirty="0"/>
+              <a:t>                   Iqra Sajid </a:t>
+            </a:r>
+          </a:p>
+          <a:p>
+            <a:r>
+              <a:rPr lang="en-US" dirty="0"/>
+              <a:t>                   Faiza Kousar</a:t>
+            </a:r>
+          </a:p>
+          <a:p>
+            <a:r>
+              <a:rPr lang="en-US" dirty="0"/>
+              <a:t>                   Tayyaba Sahar </a:t>
+            </a:r>
+          </a:p>
+        </p:txBody>
+      </p:sp>
+    </p:spTree>
+    <p:extLst>
+      <p:ext uri="{BB962C8B-B14F-4D97-AF65-F5344CB8AC3E}">
+        <p14:creationId xmlns:p14="http://schemas.microsoft.com/office/powerpoint/2010/main" val="2445699501"/>
+      </p:ext>
+    </p:extLst>
+  </p:cSld>
+  <p:clrMapOvr>
+    <a:masterClrMapping/>
+  </p:clrMapOvr>
+</p:sld>
+</file>
+
+<file path=ppt/slides/slide2.xml><?xml version="1.0" encoding="utf-8"?>
+<p:sld xmlns:a="http://schemas.openxmlformats.org/drawingml/2006/main" xmlns:r="http://schemas.openxmlformats.org/officeDocument/2006/relationships" xmlns:p="http://schemas.openxmlformats.org/presentationml/2006/main">
   <p:cSld name="Slide 1">
     <p:bg>
       <p:bgPr>
         <a:solidFill>
           <a:srgbClr val="F7FBFC"/>
         </a:solidFill>
+        <a:effectLst/>
       </p:bgPr>
     </p:bg>
     <p:spTree>
@@ -1266,7 +1186,7 @@
         </p:nvSpPr>
         <p:spPr>
           <a:xfrm>
-            <a:off x="0" y="0"/>
+            <a:off x="0" y="-18473"/>
             <a:ext cx="12191695" cy="201168"/>
           </a:xfrm>
           <a:prstGeom prst="rect">
@@ -1304,7 +1224,7 @@
           <a:bodyPr wrap="square" lIns="0" tIns="0" rIns="0" bIns="0" rtlCol="0" anchor="ctr"/>
           <a:lstStyle/>
           <a:p>
-            <a:pPr indent="0" marL="0">
+            <a:pPr marL="0" indent="0">
               <a:buNone/>
             </a:pPr>
             <a:r>
@@ -1340,7 +1260,7 @@
           <a:bodyPr wrap="square" lIns="0" tIns="0" rIns="0" bIns="0" rtlCol="0" anchor="ctr"/>
           <a:lstStyle/>
           <a:p>
-            <a:pPr indent="0" marL="0">
+            <a:pPr marL="0" indent="0">
               <a:buNone/>
             </a:pPr>
             <a:r>
@@ -1374,11 +1294,11 @@
         </p:spPr>
         <p:txBody>
           <a:bodyPr wrap="square" lIns="254" tIns="254" rIns="254" bIns="254" rtlCol="0" anchor="ctr">
-            <a:normAutofit/>
+            <a:normAutofit lnSpcReduction="10000"/>
           </a:bodyPr>
           <a:lstStyle/>
           <a:p>
-            <a:pPr indent="0" marL="0">
+            <a:pPr marL="0" indent="0">
               <a:buNone/>
             </a:pPr>
             <a:r>
@@ -1439,11 +1359,11 @@
         </p:spPr>
         <p:txBody>
           <a:bodyPr wrap="square" lIns="0" tIns="0" rIns="0" bIns="0" rtlCol="0" anchor="ctr">
-            <a:normAutofit/>
+            <a:normAutofit fontScale="92500" lnSpcReduction="20000"/>
           </a:bodyPr>
           <a:lstStyle/>
           <a:p>
-            <a:pPr indent="0" marL="0">
+            <a:pPr marL="0" indent="0">
               <a:buNone/>
             </a:pPr>
             <a:r>
@@ -1504,7 +1424,7 @@
           <a:bodyPr wrap="square" lIns="0" tIns="0" rIns="0" bIns="0" rtlCol="0" anchor="ctr"/>
           <a:lstStyle/>
           <a:p>
-            <a:pPr algn="ctr" indent="0" marL="0">
+            <a:pPr marL="0" indent="0" algn="ctr">
               <a:buNone/>
             </a:pPr>
             <a:r>
@@ -1542,7 +1462,7 @@
           </a:bodyPr>
           <a:lstStyle/>
           <a:p>
-            <a:pPr indent="0" marL="0">
+            <a:pPr marL="0" indent="0">
               <a:buNone/>
             </a:pPr>
             <a:r>
@@ -1603,7 +1523,7 @@
           <a:bodyPr wrap="square" lIns="0" tIns="0" rIns="0" bIns="0" rtlCol="0" anchor="ctr"/>
           <a:lstStyle/>
           <a:p>
-            <a:pPr algn="ctr" indent="0" marL="0">
+            <a:pPr marL="0" indent="0" algn="ctr">
               <a:buNone/>
             </a:pPr>
             <a:r>
@@ -1641,7 +1561,7 @@
           </a:bodyPr>
           <a:lstStyle/>
           <a:p>
-            <a:pPr indent="0" marL="0">
+            <a:pPr marL="0" indent="0">
               <a:buNone/>
             </a:pPr>
             <a:r>
@@ -1702,7 +1622,7 @@
           <a:bodyPr wrap="square" lIns="0" tIns="0" rIns="0" bIns="0" rtlCol="0" anchor="ctr"/>
           <a:lstStyle/>
           <a:p>
-            <a:pPr algn="ctr" indent="0" marL="0">
+            <a:pPr marL="0" indent="0" algn="ctr">
               <a:buNone/>
             </a:pPr>
             <a:r>
@@ -1740,7 +1660,7 @@
           </a:bodyPr>
           <a:lstStyle/>
           <a:p>
-            <a:pPr indent="0" marL="0">
+            <a:pPr marL="0" indent="0">
               <a:buNone/>
             </a:pPr>
             <a:r>
@@ -1801,7 +1721,7 @@
           <a:bodyPr wrap="square" lIns="0" tIns="0" rIns="0" bIns="0" rtlCol="0" anchor="ctr"/>
           <a:lstStyle/>
           <a:p>
-            <a:pPr algn="ctr" indent="0" marL="0">
+            <a:pPr marL="0" indent="0" algn="ctr">
               <a:buNone/>
             </a:pPr>
             <a:r>
@@ -1839,7 +1759,7 @@
           </a:bodyPr>
           <a:lstStyle/>
           <a:p>
-            <a:pPr indent="0" marL="0">
+            <a:pPr marL="0" indent="0">
               <a:buNone/>
             </a:pPr>
             <a:r>
@@ -1902,7 +1822,7 @@
           <a:bodyPr wrap="square" lIns="0" tIns="0" rIns="0" bIns="0" rtlCol="0" anchor="ctr"/>
           <a:lstStyle/>
           <a:p>
-            <a:pPr algn="ctr" indent="0" marL="0">
+            <a:pPr marL="0" indent="0" algn="ctr">
               <a:buNone/>
             </a:pPr>
             <a:r>
@@ -1965,7 +1885,7 @@
           <a:bodyPr wrap="square" lIns="0" tIns="0" rIns="0" bIns="0" rtlCol="0" anchor="ctr"/>
           <a:lstStyle/>
           <a:p>
-            <a:pPr algn="ctr" indent="0" marL="0">
+            <a:pPr marL="0" indent="0" algn="ctr">
               <a:buNone/>
             </a:pPr>
             <a:r>
@@ -2028,7 +1948,7 @@
           <a:bodyPr wrap="square" lIns="0" tIns="0" rIns="0" bIns="0" rtlCol="0" anchor="ctr"/>
           <a:lstStyle/>
           <a:p>
-            <a:pPr algn="ctr" indent="0" marL="0">
+            <a:pPr marL="0" indent="0" algn="ctr">
               <a:buNone/>
             </a:pPr>
             <a:r>
@@ -2066,17 +1986,9 @@
           </a:bodyPr>
           <a:lstStyle/>
           <a:p>
-            <a:pPr indent="0" marL="0">
-              <a:buNone/>
-            </a:pPr>
-            <a:r>
-              <a:rPr lang="en-US" sz="1700" b="1" dirty="0">
-                <a:solidFill>
-                  <a:srgbClr val="17252A"/>
-                </a:solidFill>
-              </a:rPr>
-              <a:t>Goal: give a clear, personalized, practical roadmap that a student can actually follow.</a:t>
-            </a:r>
+            <a:pPr marL="0" indent="0">
+              <a:buNone/>
+            </a:pPr>
             <a:endParaRPr lang="en-US" sz="1700" dirty="0"/>
           </a:p>
         </p:txBody>
@@ -2102,7 +2014,7 @@
           <a:bodyPr wrap="square" lIns="0" tIns="0" rIns="0" bIns="0" rtlCol="0" anchor="ctr"/>
           <a:lstStyle/>
           <a:p>
-            <a:pPr algn="r" indent="0" marL="0">
+            <a:pPr marL="0" indent="0" algn="r">
               <a:buNone/>
             </a:pPr>
             <a:r>
@@ -2125,7 +2037,7 @@
 </p:sld>
 </file>
 
-<file path=ppt/slides/slide2.xml><?xml version="1.0" encoding="utf-8"?>
+<file path=ppt/slides/slide3.xml><?xml version="1.0" encoding="utf-8"?>
 <p:sld xmlns:a="http://schemas.openxmlformats.org/drawingml/2006/main" xmlns:r="http://schemas.openxmlformats.org/officeDocument/2006/relationships" xmlns:p="http://schemas.openxmlformats.org/presentationml/2006/main">
   <p:cSld name="Slide 2">
     <p:bg>
@@ -2133,6 +2045,7 @@
         <a:solidFill>
           <a:srgbClr val="F7FBFC"/>
         </a:solidFill>
+        <a:effectLst/>
       </p:bgPr>
     </p:bg>
     <p:spTree>
@@ -2170,7 +2083,7 @@
           <a:bodyPr wrap="square" lIns="0" tIns="0" rIns="0" bIns="0" rtlCol="0" anchor="ctr"/>
           <a:lstStyle/>
           <a:p>
-            <a:pPr indent="0" marL="0">
+            <a:pPr marL="0" indent="0">
               <a:buNone/>
             </a:pPr>
             <a:r>
@@ -2209,7 +2122,7 @@
           <a:bodyPr wrap="square" lIns="0" tIns="0" rIns="0" bIns="0" rtlCol="0" anchor="ctr"/>
           <a:lstStyle/>
           <a:p>
-            <a:pPr indent="0" marL="0">
+            <a:pPr marL="0" indent="0">
               <a:buNone/>
             </a:pPr>
             <a:r>
@@ -2295,7 +2208,7 @@
           <a:bodyPr wrap="square" lIns="0" tIns="0" rIns="0" bIns="0" rtlCol="0" anchor="ctr"/>
           <a:lstStyle/>
           <a:p>
-            <a:pPr indent="0" marL="0">
+            <a:pPr marL="0" indent="0">
               <a:buNone/>
             </a:pPr>
             <a:r>
@@ -2333,7 +2246,7 @@
           </a:bodyPr>
           <a:lstStyle/>
           <a:p>
-            <a:pPr indent="0" marL="0">
+            <a:pPr marL="0" indent="0">
               <a:buNone/>
             </a:pPr>
             <a:r>
@@ -2396,7 +2309,7 @@
           <a:bodyPr wrap="square" lIns="0" tIns="0" rIns="0" bIns="0" rtlCol="0" anchor="ctr"/>
           <a:lstStyle/>
           <a:p>
-            <a:pPr indent="0" marL="0">
+            <a:pPr marL="0" indent="0">
               <a:buNone/>
             </a:pPr>
             <a:r>
@@ -2434,7 +2347,7 @@
           </a:bodyPr>
           <a:lstStyle/>
           <a:p>
-            <a:pPr indent="0" marL="0">
+            <a:pPr marL="0" indent="0">
               <a:buNone/>
             </a:pPr>
             <a:r>
@@ -2497,7 +2410,7 @@
           <a:bodyPr wrap="square" lIns="0" tIns="0" rIns="0" bIns="0" rtlCol="0" anchor="ctr"/>
           <a:lstStyle/>
           <a:p>
-            <a:pPr indent="0" marL="0">
+            <a:pPr marL="0" indent="0">
               <a:buNone/>
             </a:pPr>
             <a:r>
@@ -2535,7 +2448,7 @@
           </a:bodyPr>
           <a:lstStyle/>
           <a:p>
-            <a:pPr indent="0" marL="0">
+            <a:pPr marL="0" indent="0">
               <a:buNone/>
             </a:pPr>
             <a:r>
@@ -2598,7 +2511,7 @@
           <a:bodyPr wrap="square" lIns="0" tIns="0" rIns="0" bIns="0" rtlCol="0" anchor="ctr"/>
           <a:lstStyle/>
           <a:p>
-            <a:pPr indent="0" marL="0">
+            <a:pPr marL="0" indent="0">
               <a:buNone/>
             </a:pPr>
             <a:r>
@@ -2636,7 +2549,7 @@
           </a:bodyPr>
           <a:lstStyle/>
           <a:p>
-            <a:pPr indent="0" marL="0">
+            <a:pPr marL="0" indent="0">
               <a:buNone/>
             </a:pPr>
             <a:r>
@@ -2699,7 +2612,7 @@
           <a:bodyPr wrap="square" lIns="0" tIns="0" rIns="0" bIns="0" rtlCol="0" anchor="ctr"/>
           <a:lstStyle/>
           <a:p>
-            <a:pPr indent="0" marL="0">
+            <a:pPr marL="0" indent="0">
               <a:buNone/>
             </a:pPr>
             <a:r>
@@ -2737,7 +2650,7 @@
           </a:bodyPr>
           <a:lstStyle/>
           <a:p>
-            <a:pPr indent="0" marL="0">
+            <a:pPr marL="0" indent="0">
               <a:buNone/>
             </a:pPr>
             <a:r>
@@ -2800,7 +2713,7 @@
           <a:bodyPr wrap="square" lIns="0" tIns="0" rIns="0" bIns="0" rtlCol="0" anchor="ctr"/>
           <a:lstStyle/>
           <a:p>
-            <a:pPr indent="0" marL="0">
+            <a:pPr marL="0" indent="0">
               <a:buNone/>
             </a:pPr>
             <a:r>
@@ -2838,7 +2751,7 @@
           </a:bodyPr>
           <a:lstStyle/>
           <a:p>
-            <a:pPr indent="0" marL="0">
+            <a:pPr marL="0" indent="0">
               <a:buNone/>
             </a:pPr>
             <a:r>
@@ -2924,7 +2837,7 @@
           <a:bodyPr wrap="square" lIns="0" tIns="0" rIns="0" bIns="0" rtlCol="0" anchor="ctr"/>
           <a:lstStyle/>
           <a:p>
-            <a:pPr algn="ctr" indent="0" marL="0">
+            <a:pPr marL="0" indent="0" algn="ctr">
               <a:buNone/>
             </a:pPr>
             <a:r>
@@ -2960,7 +2873,7 @@
           <a:bodyPr wrap="square" lIns="0" tIns="0" rIns="0" bIns="0" rtlCol="0" anchor="ctr"/>
           <a:lstStyle/>
           <a:p>
-            <a:pPr algn="r" indent="0" marL="0">
+            <a:pPr marL="0" indent="0" algn="r">
               <a:buNone/>
             </a:pPr>
             <a:r>
@@ -2983,7 +2896,7 @@
 </p:sld>
 </file>
 
-<file path=ppt/slides/slide3.xml><?xml version="1.0" encoding="utf-8"?>
+<file path=ppt/slides/slide4.xml><?xml version="1.0" encoding="utf-8"?>
 <p:sld xmlns:a="http://schemas.openxmlformats.org/drawingml/2006/main" xmlns:r="http://schemas.openxmlformats.org/officeDocument/2006/relationships" xmlns:p="http://schemas.openxmlformats.org/presentationml/2006/main">
   <p:cSld name="Slide 3">
     <p:bg>
@@ -2991,6 +2904,7 @@
         <a:solidFill>
           <a:srgbClr val="F7FBFC"/>
         </a:solidFill>
+        <a:effectLst/>
       </p:bgPr>
     </p:bg>
     <p:spTree>
@@ -3028,7 +2942,7 @@
           <a:bodyPr wrap="square" lIns="0" tIns="0" rIns="0" bIns="0" rtlCol="0" anchor="ctr"/>
           <a:lstStyle/>
           <a:p>
-            <a:pPr indent="0" marL="0">
+            <a:pPr marL="0" indent="0">
               <a:buNone/>
             </a:pPr>
             <a:r>
@@ -3067,7 +2981,7 @@
           <a:bodyPr wrap="square" lIns="0" tIns="0" rIns="0" bIns="0" rtlCol="0" anchor="ctr"/>
           <a:lstStyle/>
           <a:p>
-            <a:pPr indent="0" marL="0">
+            <a:pPr marL="0" indent="0">
               <a:buNone/>
             </a:pPr>
             <a:r>
@@ -3107,14 +3021,14 @@
       </p:sp>
       <p:pic>
         <p:nvPicPr>
-          <p:cNvPr id="5" name="Image 0" descr="/mnt/data/CareerCompass-AI/flowchart/career_compass_flowchart.png">    </p:cNvPr>
+          <p:cNvPr id="5" name="Image 0" descr="/mnt/data/CareerCompass-AI/flowchart/career_compass_flowchart.png"/>
           <p:cNvPicPr>
             <a:picLocks noChangeAspect="1"/>
           </p:cNvPicPr>
           <p:nvPr/>
         </p:nvPicPr>
         <p:blipFill>
-          <a:blip r:embed="rId1"/>
+          <a:blip r:embed="rId3"/>
           <a:stretch>
             <a:fillRect/>
           </a:stretch>
@@ -3150,7 +3064,7 @@
           <a:bodyPr wrap="square" lIns="0" tIns="0" rIns="0" bIns="0" rtlCol="0" anchor="ctr"/>
           <a:lstStyle/>
           <a:p>
-            <a:pPr indent="0" marL="0">
+            <a:pPr marL="0" indent="0">
               <a:buNone/>
             </a:pPr>
             <a:r>
@@ -3188,7 +3102,7 @@
           </a:bodyPr>
           <a:lstStyle/>
           <a:p>
-            <a:pPr indent="0" marL="0">
+            <a:pPr marL="0" indent="0">
               <a:buNone/>
             </a:pPr>
             <a:r>
@@ -3224,7 +3138,7 @@
           <a:bodyPr wrap="square" lIns="0" tIns="0" rIns="0" bIns="0" rtlCol="0" anchor="ctr"/>
           <a:lstStyle/>
           <a:p>
-            <a:pPr indent="0" marL="0">
+            <a:pPr marL="0" indent="0">
               <a:buNone/>
             </a:pPr>
             <a:r>
@@ -3262,7 +3176,7 @@
           </a:bodyPr>
           <a:lstStyle/>
           <a:p>
-            <a:pPr indent="0" marL="0">
+            <a:pPr marL="0" indent="0">
               <a:buNone/>
             </a:pPr>
             <a:r>
@@ -3298,7 +3212,7 @@
           <a:bodyPr wrap="square" lIns="0" tIns="0" rIns="0" bIns="0" rtlCol="0" anchor="ctr"/>
           <a:lstStyle/>
           <a:p>
-            <a:pPr indent="0" marL="0">
+            <a:pPr marL="0" indent="0">
               <a:buNone/>
             </a:pPr>
             <a:r>
@@ -3336,7 +3250,7 @@
           </a:bodyPr>
           <a:lstStyle/>
           <a:p>
-            <a:pPr indent="0" marL="0">
+            <a:pPr marL="0" indent="0">
               <a:buNone/>
             </a:pPr>
             <a:r>
@@ -3372,7 +3286,7 @@
           <a:bodyPr wrap="square" lIns="0" tIns="0" rIns="0" bIns="0" rtlCol="0" anchor="ctr"/>
           <a:lstStyle/>
           <a:p>
-            <a:pPr algn="r" indent="0" marL="0">
+            <a:pPr marL="0" indent="0" algn="r">
               <a:buNone/>
             </a:pPr>
             <a:r>
@@ -3395,7 +3309,7 @@
 </p:sld>
 </file>
 
-<file path=ppt/slides/slide4.xml><?xml version="1.0" encoding="utf-8"?>
+<file path=ppt/slides/slide5.xml><?xml version="1.0" encoding="utf-8"?>
 <p:sld xmlns:a="http://schemas.openxmlformats.org/drawingml/2006/main" xmlns:r="http://schemas.openxmlformats.org/officeDocument/2006/relationships" xmlns:p="http://schemas.openxmlformats.org/presentationml/2006/main">
   <p:cSld name="Slide 4">
     <p:bg>
@@ -3403,6 +3317,7 @@
         <a:solidFill>
           <a:srgbClr val="F7FBFC"/>
         </a:solidFill>
+        <a:effectLst/>
       </p:bgPr>
     </p:bg>
     <p:spTree>
@@ -3440,7 +3355,7 @@
           <a:bodyPr wrap="square" lIns="0" tIns="0" rIns="0" bIns="0" rtlCol="0" anchor="ctr"/>
           <a:lstStyle/>
           <a:p>
-            <a:pPr indent="0" marL="0">
+            <a:pPr marL="0" indent="0">
               <a:buNone/>
             </a:pPr>
             <a:r>
@@ -3479,7 +3394,7 @@
           <a:bodyPr wrap="square" lIns="0" tIns="0" rIns="0" bIns="0" rtlCol="0" anchor="ctr"/>
           <a:lstStyle/>
           <a:p>
-            <a:pPr indent="0" marL="0">
+            <a:pPr marL="0" indent="0">
               <a:buNone/>
             </a:pPr>
             <a:r>
@@ -3519,58 +3434,6 @@
       </p:sp>
       <p:sp>
         <p:nvSpPr>
-          <p:cNvPr id="5" name="Shape 3"/>
-          <p:cNvSpPr/>
-          <p:nvPr/>
-        </p:nvSpPr>
-        <p:spPr>
-          <a:xfrm>
-            <a:off x="685800" y="1417320"/>
-            <a:ext cx="5303520" cy="4069080"/>
-          </a:xfrm>
-          <a:prstGeom prst="roundRect">
-            <a:avLst>
-              <a:gd name="adj" fmla="val 2247"/>
-            </a:avLst>
-          </a:prstGeom>
-          <a:solidFill>
-            <a:srgbClr val="FFFFFF"/>
-          </a:solidFill>
-          <a:ln w="13970">
-            <a:solidFill>
-              <a:srgbClr val="D6E6E8"/>
-            </a:solidFill>
-            <a:prstDash val="solid"/>
-          </a:ln>
-        </p:spPr>
-      </p:sp>
-      <p:sp>
-        <p:nvSpPr>
-          <p:cNvPr id="6" name="Shape 4"/>
-          <p:cNvSpPr/>
-          <p:nvPr/>
-        </p:nvSpPr>
-        <p:spPr>
-          <a:xfrm>
-            <a:off x="685800" y="1417320"/>
-            <a:ext cx="5303520" cy="438912"/>
-          </a:xfrm>
-          <a:prstGeom prst="rect">
-            <a:avLst/>
-          </a:prstGeom>
-          <a:solidFill>
-            <a:srgbClr val="0D5C63"/>
-          </a:solidFill>
-          <a:ln w="12700">
-            <a:solidFill>
-              <a:srgbClr val="0D5C63"/>
-            </a:solidFill>
-            <a:prstDash val="solid"/>
-          </a:ln>
-        </p:spPr>
-      </p:sp>
-      <p:sp>
-        <p:nvSpPr>
           <p:cNvPr id="7" name="Text 5"/>
           <p:cNvSpPr/>
           <p:nvPr/>
@@ -3590,7 +3453,7 @@
           <a:bodyPr wrap="square" lIns="0" tIns="0" rIns="0" bIns="0" rtlCol="0" anchor="ctr"/>
           <a:lstStyle/>
           <a:p>
-            <a:pPr indent="0" marL="0">
+            <a:pPr marL="0" indent="0">
               <a:buNone/>
             </a:pPr>
             <a:r>
@@ -3626,7 +3489,7 @@
           <a:bodyPr wrap="square" lIns="0" tIns="0" rIns="0" bIns="0" rtlCol="0" anchor="ctr"/>
           <a:lstStyle/>
           <a:p>
-            <a:pPr indent="0" marL="0">
+            <a:pPr marL="0" indent="0">
               <a:buNone/>
             </a:pPr>
             <a:r>
@@ -3638,42 +3501,6 @@
               <a:t>Recommended Career</a:t>
             </a:r>
             <a:endParaRPr lang="en-US" sz="1100" dirty="0"/>
-          </a:p>
-        </p:txBody>
-      </p:sp>
-      <p:sp>
-        <p:nvSpPr>
-          <p:cNvPr id="9" name="Text 7"/>
-          <p:cNvSpPr/>
-          <p:nvPr/>
-        </p:nvSpPr>
-        <p:spPr>
-          <a:xfrm>
-            <a:off x="1005840" y="2423160"/>
-            <a:ext cx="2468880" cy="320040"/>
-          </a:xfrm>
-          <a:prstGeom prst="rect">
-            <a:avLst/>
-          </a:prstGeom>
-          <a:noFill/>
-          <a:ln/>
-        </p:spPr>
-        <p:txBody>
-          <a:bodyPr wrap="square" lIns="0" tIns="0" rIns="0" bIns="0" rtlCol="0" anchor="ctr"/>
-          <a:lstStyle/>
-          <a:p>
-            <a:pPr indent="0" marL="0">
-              <a:buNone/>
-            </a:pPr>
-            <a:r>
-              <a:rPr lang="en-US" sz="1900" b="1" dirty="0">
-                <a:solidFill>
-                  <a:srgbClr val="0D5C63"/>
-                </a:solidFill>
-              </a:rPr>
-              <a:t>AI Engineer</a:t>
-            </a:r>
-            <a:endParaRPr lang="en-US" sz="1900" dirty="0"/>
           </a:p>
         </p:txBody>
       </p:sp>
@@ -3698,7 +3525,7 @@
           <a:bodyPr wrap="square" lIns="0" tIns="0" rIns="0" bIns="0" rtlCol="0" anchor="ctr"/>
           <a:lstStyle/>
           <a:p>
-            <a:pPr indent="0" marL="0">
+            <a:pPr marL="0" indent="0">
               <a:buNone/>
             </a:pPr>
             <a:r>
@@ -3734,7 +3561,7 @@
           <a:bodyPr wrap="square" lIns="0" tIns="0" rIns="0" bIns="0" rtlCol="0" anchor="ctr"/>
           <a:lstStyle/>
           <a:p>
-            <a:pPr indent="0" marL="0">
+            <a:pPr marL="0" indent="0">
               <a:buNone/>
             </a:pPr>
             <a:r>
@@ -3770,7 +3597,7 @@
           <a:bodyPr wrap="square" lIns="0" tIns="0" rIns="0" bIns="0" rtlCol="0" anchor="ctr"/>
           <a:lstStyle/>
           <a:p>
-            <a:pPr indent="0" marL="0">
+            <a:pPr marL="0" indent="0">
               <a:buNone/>
             </a:pPr>
             <a:r>
@@ -3806,7 +3633,7 @@
           <a:bodyPr wrap="square" lIns="0" tIns="0" rIns="0" bIns="0" rtlCol="0" anchor="ctr"/>
           <a:lstStyle/>
           <a:p>
-            <a:pPr indent="0" marL="0">
+            <a:pPr marL="0" indent="0">
               <a:buNone/>
             </a:pPr>
             <a:r>
@@ -3820,201 +3647,6 @@
             <a:endParaRPr lang="en-US" sz="1900" dirty="0"/>
           </a:p>
         </p:txBody>
-      </p:sp>
-      <p:sp>
-        <p:nvSpPr>
-          <p:cNvPr id="14" name="Text 12"/>
-          <p:cNvSpPr/>
-          <p:nvPr/>
-        </p:nvSpPr>
-        <p:spPr>
-          <a:xfrm>
-            <a:off x="1005840" y="3081528"/>
-            <a:ext cx="4617720" cy="1261872"/>
-          </a:xfrm>
-          <a:prstGeom prst="rect">
-            <a:avLst/>
-          </a:prstGeom>
-          <a:noFill/>
-          <a:ln/>
-        </p:spPr>
-        <p:txBody>
-          <a:bodyPr wrap="square" lIns="508" tIns="508" rIns="508" bIns="508" rtlCol="0" anchor="ctr">
-            <a:normAutofit/>
-          </a:bodyPr>
-          <a:lstStyle/>
-          <a:p>
-            <a:pPr indent="0" marL="0">
-              <a:buNone/>
-            </a:pPr>
-            <a:r>
-              <a:rPr lang="en-US" sz="1300" dirty="0">
-                <a:solidFill>
-                  <a:srgbClr val="17252A"/>
-                </a:solidFill>
-              </a:rPr>
-              <a:t>Weeks 1–2: Python + ML basics</a:t>
-            </a:r>
-            <a:endParaRPr lang="en-US" sz="1300" dirty="0"/>
-          </a:p>
-          <a:p>
-            <a:pPr indent="0" marL="0">
-              <a:buNone/>
-            </a:pPr>
-            <a:r>
-              <a:rPr lang="en-US" sz="1300" dirty="0">
-                <a:solidFill>
-                  <a:srgbClr val="17252A"/>
-                </a:solidFill>
-              </a:rPr>
-              <a:t>Weeks 3–4: LangChain/LangGraph</a:t>
-            </a:r>
-            <a:endParaRPr lang="en-US" sz="1300" dirty="0"/>
-          </a:p>
-          <a:p>
-            <a:pPr indent="0" marL="0">
-              <a:buNone/>
-            </a:pPr>
-            <a:r>
-              <a:rPr lang="en-US" sz="1300" dirty="0">
-                <a:solidFill>
-                  <a:srgbClr val="17252A"/>
-                </a:solidFill>
-              </a:rPr>
-              <a:t>Weeks 5–8: AI agent projects</a:t>
-            </a:r>
-            <a:endParaRPr lang="en-US" sz="1300" dirty="0"/>
-          </a:p>
-          <a:p>
-            <a:pPr indent="0" marL="0">
-              <a:buNone/>
-            </a:pPr>
-            <a:r>
-              <a:rPr lang="en-US" sz="1300" dirty="0">
-                <a:solidFill>
-                  <a:srgbClr val="17252A"/>
-                </a:solidFill>
-              </a:rPr>
-              <a:t>Weeks 9–12: portfolio + deployment</a:t>
-            </a:r>
-            <a:endParaRPr lang="en-US" sz="1300" dirty="0"/>
-          </a:p>
-        </p:txBody>
-      </p:sp>
-      <p:sp>
-        <p:nvSpPr>
-          <p:cNvPr id="15" name="Shape 13"/>
-          <p:cNvSpPr/>
-          <p:nvPr/>
-        </p:nvSpPr>
-        <p:spPr>
-          <a:xfrm>
-            <a:off x="1005840" y="4663440"/>
-            <a:ext cx="4480560" cy="438912"/>
-          </a:xfrm>
-          <a:prstGeom prst="roundRect">
-            <a:avLst>
-              <a:gd name="adj" fmla="val 16667"/>
-            </a:avLst>
-          </a:prstGeom>
-          <a:solidFill>
-            <a:srgbClr val="F3F8F9"/>
-          </a:solidFill>
-          <a:ln w="12700">
-            <a:solidFill>
-              <a:srgbClr val="DDEBED"/>
-            </a:solidFill>
-            <a:prstDash val="solid"/>
-          </a:ln>
-        </p:spPr>
-      </p:sp>
-      <p:sp>
-        <p:nvSpPr>
-          <p:cNvPr id="16" name="Text 14"/>
-          <p:cNvSpPr/>
-          <p:nvPr/>
-        </p:nvSpPr>
-        <p:spPr>
-          <a:xfrm>
-            <a:off x="1143000" y="4818888"/>
-            <a:ext cx="4160520" cy="109728"/>
-          </a:xfrm>
-          <a:prstGeom prst="rect">
-            <a:avLst/>
-          </a:prstGeom>
-          <a:noFill/>
-          <a:ln/>
-        </p:spPr>
-        <p:txBody>
-          <a:bodyPr wrap="square" lIns="0" tIns="0" rIns="0" bIns="0" rtlCol="0" anchor="ctr"/>
-          <a:lstStyle/>
-          <a:p>
-            <a:pPr algn="ctr" indent="0" marL="0">
-              <a:buNone/>
-            </a:pPr>
-            <a:r>
-              <a:rPr lang="en-US" sz="820" dirty="0">
-                <a:solidFill>
-                  <a:srgbClr val="5C6B73"/>
-                </a:solidFill>
-              </a:rPr>
-              <a:t>During final prep, replace this mockup with your actual Streamlit screenshot.</a:t>
-            </a:r>
-            <a:endParaRPr lang="en-US" sz="820" dirty="0"/>
-          </a:p>
-        </p:txBody>
-      </p:sp>
-      <p:sp>
-        <p:nvSpPr>
-          <p:cNvPr id="17" name="Shape 15"/>
-          <p:cNvSpPr/>
-          <p:nvPr/>
-        </p:nvSpPr>
-        <p:spPr>
-          <a:xfrm>
-            <a:off x="6217920" y="1417320"/>
-            <a:ext cx="5303520" cy="4069080"/>
-          </a:xfrm>
-          <a:prstGeom prst="roundRect">
-            <a:avLst>
-              <a:gd name="adj" fmla="val 2247"/>
-            </a:avLst>
-          </a:prstGeom>
-          <a:solidFill>
-            <a:srgbClr val="FFFFFF"/>
-          </a:solidFill>
-          <a:ln w="13970">
-            <a:solidFill>
-              <a:srgbClr val="D6E6E8"/>
-            </a:solidFill>
-            <a:prstDash val="solid"/>
-          </a:ln>
-        </p:spPr>
-      </p:sp>
-      <p:sp>
-        <p:nvSpPr>
-          <p:cNvPr id="18" name="Shape 16"/>
-          <p:cNvSpPr/>
-          <p:nvPr/>
-        </p:nvSpPr>
-        <p:spPr>
-          <a:xfrm>
-            <a:off x="6217920" y="1417320"/>
-            <a:ext cx="5303520" cy="438912"/>
-          </a:xfrm>
-          <a:prstGeom prst="rect">
-            <a:avLst/>
-          </a:prstGeom>
-          <a:solidFill>
-            <a:srgbClr val="F28C28"/>
-          </a:solidFill>
-          <a:ln w="12700">
-            <a:solidFill>
-              <a:srgbClr val="F28C28"/>
-            </a:solidFill>
-            <a:prstDash val="solid"/>
-          </a:ln>
-        </p:spPr>
       </p:sp>
       <p:sp>
         <p:nvSpPr>
@@ -4037,7 +3669,7 @@
           <a:bodyPr wrap="square" lIns="0" tIns="0" rIns="0" bIns="0" rtlCol="0" anchor="ctr"/>
           <a:lstStyle/>
           <a:p>
-            <a:pPr indent="0" marL="0">
+            <a:pPr marL="0" indent="0">
               <a:buNone/>
             </a:pPr>
             <a:r>
@@ -4073,7 +3705,7 @@
           <a:bodyPr wrap="square" lIns="0" tIns="0" rIns="0" bIns="0" rtlCol="0" anchor="ctr"/>
           <a:lstStyle/>
           <a:p>
-            <a:pPr indent="0" marL="0">
+            <a:pPr marL="0" indent="0">
               <a:buNone/>
             </a:pPr>
             <a:r>
@@ -4109,7 +3741,7 @@
           <a:bodyPr wrap="square" lIns="0" tIns="0" rIns="0" bIns="0" rtlCol="0" anchor="ctr"/>
           <a:lstStyle/>
           <a:p>
-            <a:pPr indent="0" marL="0">
+            <a:pPr marL="0" indent="0">
               <a:buNone/>
             </a:pPr>
             <a:r>
@@ -4145,7 +3777,7 @@
           <a:bodyPr wrap="square" lIns="0" tIns="0" rIns="0" bIns="0" rtlCol="0" anchor="ctr"/>
           <a:lstStyle/>
           <a:p>
-            <a:pPr indent="0" marL="0">
+            <a:pPr marL="0" indent="0">
               <a:buNone/>
             </a:pPr>
             <a:r>
@@ -4181,7 +3813,7 @@
           <a:bodyPr wrap="square" lIns="0" tIns="0" rIns="0" bIns="0" rtlCol="0" anchor="ctr"/>
           <a:lstStyle/>
           <a:p>
-            <a:pPr indent="0" marL="0">
+            <a:pPr marL="0" indent="0">
               <a:buNone/>
             </a:pPr>
             <a:r>
@@ -4217,7 +3849,7 @@
           <a:bodyPr wrap="square" lIns="0" tIns="0" rIns="0" bIns="0" rtlCol="0" anchor="ctr"/>
           <a:lstStyle/>
           <a:p>
-            <a:pPr indent="0" marL="0">
+            <a:pPr marL="0" indent="0">
               <a:buNone/>
             </a:pPr>
             <a:r>
@@ -4253,7 +3885,7 @@
           <a:bodyPr wrap="square" lIns="0" tIns="0" rIns="0" bIns="0" rtlCol="0" anchor="ctr"/>
           <a:lstStyle/>
           <a:p>
-            <a:pPr indent="0" marL="0">
+            <a:pPr marL="0" indent="0">
               <a:buNone/>
             </a:pPr>
             <a:r>
@@ -4265,149 +3897,6 @@
               <a:t>2</a:t>
             </a:r>
             <a:endParaRPr lang="en-US" sz="1900" dirty="0"/>
-          </a:p>
-        </p:txBody>
-      </p:sp>
-      <p:sp>
-        <p:nvSpPr>
-          <p:cNvPr id="26" name="Text 24"/>
-          <p:cNvSpPr/>
-          <p:nvPr/>
-        </p:nvSpPr>
-        <p:spPr>
-          <a:xfrm>
-            <a:off x="6537960" y="3081528"/>
-            <a:ext cx="4617720" cy="1261872"/>
-          </a:xfrm>
-          <a:prstGeom prst="rect">
-            <a:avLst/>
-          </a:prstGeom>
-          <a:noFill/>
-          <a:ln/>
-        </p:spPr>
-        <p:txBody>
-          <a:bodyPr wrap="square" lIns="508" tIns="508" rIns="508" bIns="508" rtlCol="0" anchor="ctr">
-            <a:normAutofit/>
-          </a:bodyPr>
-          <a:lstStyle/>
-          <a:p>
-            <a:pPr indent="0" marL="0">
-              <a:buNone/>
-            </a:pPr>
-            <a:r>
-              <a:rPr lang="en-US" sz="1300" dirty="0">
-                <a:solidFill>
-                  <a:srgbClr val="17252A"/>
-                </a:solidFill>
-              </a:rPr>
-              <a:t>Weeks 1–2: Linux + networking</a:t>
-            </a:r>
-            <a:endParaRPr lang="en-US" sz="1300" dirty="0"/>
-          </a:p>
-          <a:p>
-            <a:pPr indent="0" marL="0">
-              <a:buNone/>
-            </a:pPr>
-            <a:r>
-              <a:rPr lang="en-US" sz="1300" dirty="0">
-                <a:solidFill>
-                  <a:srgbClr val="17252A"/>
-                </a:solidFill>
-              </a:rPr>
-              <a:t>Weeks 3–4: OWASP + web security</a:t>
-            </a:r>
-            <a:endParaRPr lang="en-US" sz="1300" dirty="0"/>
-          </a:p>
-          <a:p>
-            <a:pPr indent="0" marL="0">
-              <a:buNone/>
-            </a:pPr>
-            <a:r>
-              <a:rPr lang="en-US" sz="1300" dirty="0">
-                <a:solidFill>
-                  <a:srgbClr val="17252A"/>
-                </a:solidFill>
-              </a:rPr>
-              <a:t>Weeks 5–8: labs + reports</a:t>
-            </a:r>
-            <a:endParaRPr lang="en-US" sz="1300" dirty="0"/>
-          </a:p>
-          <a:p>
-            <a:pPr indent="0" marL="0">
-              <a:buNone/>
-            </a:pPr>
-            <a:r>
-              <a:rPr lang="en-US" sz="1300" dirty="0">
-                <a:solidFill>
-                  <a:srgbClr val="17252A"/>
-                </a:solidFill>
-              </a:rPr>
-              <a:t>Weeks 9–12: SIEM + interview prep</a:t>
-            </a:r>
-            <a:endParaRPr lang="en-US" sz="1300" dirty="0"/>
-          </a:p>
-        </p:txBody>
-      </p:sp>
-      <p:sp>
-        <p:nvSpPr>
-          <p:cNvPr id="27" name="Shape 25"/>
-          <p:cNvSpPr/>
-          <p:nvPr/>
-        </p:nvSpPr>
-        <p:spPr>
-          <a:xfrm>
-            <a:off x="6537960" y="4663440"/>
-            <a:ext cx="4480560" cy="438912"/>
-          </a:xfrm>
-          <a:prstGeom prst="roundRect">
-            <a:avLst>
-              <a:gd name="adj" fmla="val 16667"/>
-            </a:avLst>
-          </a:prstGeom>
-          <a:solidFill>
-            <a:srgbClr val="F3F8F9"/>
-          </a:solidFill>
-          <a:ln w="12700">
-            <a:solidFill>
-              <a:srgbClr val="DDEBED"/>
-            </a:solidFill>
-            <a:prstDash val="solid"/>
-          </a:ln>
-        </p:spPr>
-      </p:sp>
-      <p:sp>
-        <p:nvSpPr>
-          <p:cNvPr id="28" name="Text 26"/>
-          <p:cNvSpPr/>
-          <p:nvPr/>
-        </p:nvSpPr>
-        <p:spPr>
-          <a:xfrm>
-            <a:off x="6675120" y="4818888"/>
-            <a:ext cx="4160520" cy="109728"/>
-          </a:xfrm>
-          <a:prstGeom prst="rect">
-            <a:avLst/>
-          </a:prstGeom>
-          <a:noFill/>
-          <a:ln/>
-        </p:spPr>
-        <p:txBody>
-          <a:bodyPr wrap="square" lIns="0" tIns="0" rIns="0" bIns="0" rtlCol="0" anchor="ctr"/>
-          <a:lstStyle/>
-          <a:p>
-            <a:pPr algn="ctr" indent="0" marL="0">
-              <a:buNone/>
-            </a:pPr>
-            <a:r>
-              <a:rPr lang="en-US" sz="820" dirty="0">
-                <a:solidFill>
-                  <a:srgbClr val="5C6B73"/>
-                </a:solidFill>
-              </a:rPr>
-              <a:t>During final prep, replace this mockup with your actual Streamlit screenshot.</a:t>
-            </a:r>
-            <a:endParaRPr lang="en-US" sz="820" dirty="0"/>
           </a:p>
         </p:txBody>
       </p:sp>
@@ -4432,7 +3921,7 @@
           <a:bodyPr wrap="square" lIns="0" tIns="0" rIns="0" bIns="0" rtlCol="0" anchor="ctr"/>
           <a:lstStyle/>
           <a:p>
-            <a:pPr algn="ctr" indent="0" marL="0">
+            <a:pPr marL="0" indent="0" algn="ctr">
               <a:buNone/>
             </a:pPr>
             <a:r>
@@ -4468,7 +3957,7 @@
           <a:bodyPr wrap="square" lIns="0" tIns="0" rIns="0" bIns="0" rtlCol="0" anchor="ctr"/>
           <a:lstStyle/>
           <a:p>
-            <a:pPr algn="r" indent="0" marL="0">
+            <a:pPr marL="0" indent="0" algn="r">
               <a:buNone/>
             </a:pPr>
             <a:r>
@@ -4483,6 +3972,66 @@
           </a:p>
         </p:txBody>
       </p:sp>
+      <p:pic>
+        <p:nvPicPr>
+          <p:cNvPr id="32" name="Picture 31">
+            <a:extLst>
+              <a:ext uri="{FF2B5EF4-FFF2-40B4-BE49-F238E27FC236}">
+                <a16:creationId xmlns:a16="http://schemas.microsoft.com/office/drawing/2014/main" id="{D9120ED5-6D30-4F18-AB12-1F3D874ADB91}"/>
+              </a:ext>
+            </a:extLst>
+          </p:cNvPr>
+          <p:cNvPicPr>
+            <a:picLocks noChangeAspect="1"/>
+          </p:cNvPicPr>
+          <p:nvPr/>
+        </p:nvPicPr>
+        <p:blipFill>
+          <a:blip r:embed="rId3"/>
+          <a:stretch>
+            <a:fillRect/>
+          </a:stretch>
+        </p:blipFill>
+        <p:spPr>
+          <a:xfrm>
+            <a:off x="222498" y="1335026"/>
+            <a:ext cx="5321814" cy="4197091"/>
+          </a:xfrm>
+          <a:prstGeom prst="rect">
+            <a:avLst/>
+          </a:prstGeom>
+        </p:spPr>
+      </p:pic>
+      <p:pic>
+        <p:nvPicPr>
+          <p:cNvPr id="34" name="Picture 33">
+            <a:extLst>
+              <a:ext uri="{FF2B5EF4-FFF2-40B4-BE49-F238E27FC236}">
+                <a16:creationId xmlns:a16="http://schemas.microsoft.com/office/drawing/2014/main" id="{A047BDD4-E420-4893-8D9E-7DF73071B3AD}"/>
+              </a:ext>
+            </a:extLst>
+          </p:cNvPr>
+          <p:cNvPicPr>
+            <a:picLocks noChangeAspect="1"/>
+          </p:cNvPicPr>
+          <p:nvPr/>
+        </p:nvPicPr>
+        <p:blipFill>
+          <a:blip r:embed="rId4"/>
+          <a:stretch>
+            <a:fillRect/>
+          </a:stretch>
+        </p:blipFill>
+        <p:spPr>
+          <a:xfrm>
+            <a:off x="5760720" y="1344171"/>
+            <a:ext cx="5897881" cy="4178803"/>
+          </a:xfrm>
+          <a:prstGeom prst="rect">
+            <a:avLst/>
+          </a:prstGeom>
+        </p:spPr>
+      </p:pic>
     </p:spTree>
   </p:cSld>
   <p:clrMapOvr>
@@ -4491,7 +4040,7 @@
 </p:sld>
 </file>
 
-<file path=ppt/slides/slide5.xml><?xml version="1.0" encoding="utf-8"?>
+<file path=ppt/slides/slide6.xml><?xml version="1.0" encoding="utf-8"?>
 <p:sld xmlns:a="http://schemas.openxmlformats.org/drawingml/2006/main" xmlns:r="http://schemas.openxmlformats.org/officeDocument/2006/relationships" xmlns:p="http://schemas.openxmlformats.org/presentationml/2006/main">
   <p:cSld name="Slide 5">
     <p:bg>
@@ -4499,6 +4048,7 @@
         <a:solidFill>
           <a:srgbClr val="F7FBFC"/>
         </a:solidFill>
+        <a:effectLst/>
       </p:bgPr>
     </p:bg>
     <p:spTree>
@@ -4536,7 +4086,7 @@
           <a:bodyPr wrap="square" lIns="0" tIns="0" rIns="0" bIns="0" rtlCol="0" anchor="ctr"/>
           <a:lstStyle/>
           <a:p>
-            <a:pPr indent="0" marL="0">
+            <a:pPr marL="0" indent="0">
               <a:buNone/>
             </a:pPr>
             <a:r>
@@ -4575,7 +4125,7 @@
           <a:bodyPr wrap="square" lIns="0" tIns="0" rIns="0" bIns="0" rtlCol="0" anchor="ctr"/>
           <a:lstStyle/>
           <a:p>
-            <a:pPr indent="0" marL="0">
+            <a:pPr marL="0" indent="0">
               <a:buNone/>
             </a:pPr>
             <a:r>
@@ -4661,7 +4211,7 @@
           <a:bodyPr wrap="square" lIns="0" tIns="0" rIns="0" bIns="0" rtlCol="0" anchor="ctr"/>
           <a:lstStyle/>
           <a:p>
-            <a:pPr indent="0" marL="0">
+            <a:pPr marL="0" indent="0">
               <a:buNone/>
             </a:pPr>
             <a:r>
@@ -4695,11 +4245,11 @@
         </p:spPr>
         <p:txBody>
           <a:bodyPr wrap="square" lIns="0" tIns="0" rIns="0" bIns="0" rtlCol="0" anchor="ctr">
-            <a:normAutofit/>
+            <a:normAutofit fontScale="92500" lnSpcReduction="10000"/>
           </a:bodyPr>
           <a:lstStyle/>
           <a:p>
-            <a:pPr indent="0" marL="0">
+            <a:pPr marL="0" indent="0">
               <a:buNone/>
             </a:pPr>
             <a:r>
@@ -4762,7 +4312,7 @@
           <a:bodyPr wrap="square" lIns="0" tIns="0" rIns="0" bIns="0" rtlCol="0" anchor="ctr"/>
           <a:lstStyle/>
           <a:p>
-            <a:pPr indent="0" marL="0">
+            <a:pPr marL="0" indent="0">
               <a:buNone/>
             </a:pPr>
             <a:r>
@@ -4796,11 +4346,11 @@
         </p:spPr>
         <p:txBody>
           <a:bodyPr wrap="square" lIns="0" tIns="0" rIns="0" bIns="0" rtlCol="0" anchor="ctr">
-            <a:normAutofit/>
+            <a:normAutofit fontScale="92500" lnSpcReduction="10000"/>
           </a:bodyPr>
           <a:lstStyle/>
           <a:p>
-            <a:pPr indent="0" marL="0">
+            <a:pPr marL="0" indent="0">
               <a:buNone/>
             </a:pPr>
             <a:r>
@@ -4863,7 +4413,7 @@
           <a:bodyPr wrap="square" lIns="0" tIns="0" rIns="0" bIns="0" rtlCol="0" anchor="ctr"/>
           <a:lstStyle/>
           <a:p>
-            <a:pPr indent="0" marL="0">
+            <a:pPr marL="0" indent="0">
               <a:buNone/>
             </a:pPr>
             <a:r>
@@ -4897,11 +4447,11 @@
         </p:spPr>
         <p:txBody>
           <a:bodyPr wrap="square" lIns="0" tIns="0" rIns="0" bIns="0" rtlCol="0" anchor="ctr">
-            <a:normAutofit/>
+            <a:normAutofit fontScale="92500" lnSpcReduction="10000"/>
           </a:bodyPr>
           <a:lstStyle/>
           <a:p>
-            <a:pPr indent="0" marL="0">
+            <a:pPr marL="0" indent="0">
               <a:buNone/>
             </a:pPr>
             <a:r>
@@ -4964,7 +4514,7 @@
           <a:bodyPr wrap="square" lIns="0" tIns="0" rIns="0" bIns="0" rtlCol="0" anchor="ctr"/>
           <a:lstStyle/>
           <a:p>
-            <a:pPr indent="0" marL="0">
+            <a:pPr marL="0" indent="0">
               <a:buNone/>
             </a:pPr>
             <a:r>
@@ -4998,11 +4548,11 @@
         </p:spPr>
         <p:txBody>
           <a:bodyPr wrap="square" lIns="0" tIns="0" rIns="0" bIns="0" rtlCol="0" anchor="ctr">
-            <a:normAutofit/>
+            <a:normAutofit fontScale="92500" lnSpcReduction="10000"/>
           </a:bodyPr>
           <a:lstStyle/>
           <a:p>
-            <a:pPr indent="0" marL="0">
+            <a:pPr marL="0" indent="0">
               <a:buNone/>
             </a:pPr>
             <a:r>
@@ -5065,7 +4615,7 @@
           <a:bodyPr wrap="square" lIns="0" tIns="0" rIns="0" bIns="0" rtlCol="0" anchor="ctr"/>
           <a:lstStyle/>
           <a:p>
-            <a:pPr indent="0" marL="0">
+            <a:pPr marL="0" indent="0">
               <a:buNone/>
             </a:pPr>
             <a:r>
@@ -5099,11 +4649,11 @@
         </p:spPr>
         <p:txBody>
           <a:bodyPr wrap="square" lIns="0" tIns="0" rIns="0" bIns="0" rtlCol="0" anchor="ctr">
-            <a:normAutofit/>
+            <a:normAutofit fontScale="92500" lnSpcReduction="10000"/>
           </a:bodyPr>
           <a:lstStyle/>
           <a:p>
-            <a:pPr indent="0" marL="0">
+            <a:pPr marL="0" indent="0">
               <a:buNone/>
             </a:pPr>
             <a:r>
@@ -5166,7 +4716,7 @@
           <a:bodyPr wrap="square" lIns="0" tIns="0" rIns="0" bIns="0" rtlCol="0" anchor="ctr"/>
           <a:lstStyle/>
           <a:p>
-            <a:pPr indent="0" marL="0">
+            <a:pPr marL="0" indent="0">
               <a:buNone/>
             </a:pPr>
             <a:r>
@@ -5200,11 +4750,11 @@
         </p:spPr>
         <p:txBody>
           <a:bodyPr wrap="square" lIns="0" tIns="0" rIns="0" bIns="0" rtlCol="0" anchor="ctr">
-            <a:normAutofit/>
+            <a:normAutofit fontScale="92500" lnSpcReduction="10000"/>
           </a:bodyPr>
           <a:lstStyle/>
           <a:p>
-            <a:pPr indent="0" marL="0">
+            <a:pPr marL="0" indent="0">
               <a:buNone/>
             </a:pPr>
             <a:r>
@@ -5240,7 +4790,7 @@
           <a:bodyPr wrap="square" lIns="0" tIns="0" rIns="0" bIns="0" rtlCol="0" anchor="ctr"/>
           <a:lstStyle/>
           <a:p>
-            <a:pPr indent="0" marL="0">
+            <a:pPr marL="0" indent="0">
               <a:buNone/>
             </a:pPr>
             <a:r>
@@ -5299,11 +4849,11 @@
         </p:spPr>
         <p:txBody>
           <a:bodyPr wrap="square" lIns="0" tIns="0" rIns="0" bIns="0" rtlCol="0" anchor="ctr">
-            <a:normAutofit/>
+            <a:normAutofit lnSpcReduction="10000"/>
           </a:bodyPr>
           <a:lstStyle/>
           <a:p>
-            <a:pPr indent="0" marL="0">
+            <a:pPr marL="0" indent="0">
               <a:buNone/>
             </a:pPr>
             <a:r>
@@ -5362,11 +4912,11 @@
         </p:spPr>
         <p:txBody>
           <a:bodyPr wrap="square" lIns="0" tIns="0" rIns="0" bIns="0" rtlCol="0" anchor="ctr">
-            <a:normAutofit/>
+            <a:normAutofit lnSpcReduction="10000"/>
           </a:bodyPr>
           <a:lstStyle/>
           <a:p>
-            <a:pPr indent="0" marL="0">
+            <a:pPr marL="0" indent="0">
               <a:buNone/>
             </a:pPr>
             <a:r>
@@ -5425,11 +4975,11 @@
         </p:spPr>
         <p:txBody>
           <a:bodyPr wrap="square" lIns="0" tIns="0" rIns="0" bIns="0" rtlCol="0" anchor="ctr">
-            <a:normAutofit/>
+            <a:normAutofit lnSpcReduction="10000"/>
           </a:bodyPr>
           <a:lstStyle/>
           <a:p>
-            <a:pPr indent="0" marL="0">
+            <a:pPr marL="0" indent="0">
               <a:buNone/>
             </a:pPr>
             <a:r>
@@ -5488,11 +5038,11 @@
         </p:spPr>
         <p:txBody>
           <a:bodyPr wrap="square" lIns="0" tIns="0" rIns="0" bIns="0" rtlCol="0" anchor="ctr">
-            <a:normAutofit/>
+            <a:normAutofit lnSpcReduction="10000"/>
           </a:bodyPr>
           <a:lstStyle/>
           <a:p>
-            <a:pPr indent="0" marL="0">
+            <a:pPr marL="0" indent="0">
               <a:buNone/>
             </a:pPr>
             <a:r>
@@ -5506,33 +5056,6 @@
             <a:endParaRPr lang="en-US" sz="1450" dirty="0"/>
           </a:p>
         </p:txBody>
-      </p:sp>
-      <p:sp>
-        <p:nvSpPr>
-          <p:cNvPr id="32" name="Shape 30"/>
-          <p:cNvSpPr/>
-          <p:nvPr/>
-        </p:nvSpPr>
-        <p:spPr>
-          <a:xfrm>
-            <a:off x="6629400" y="5074920"/>
-            <a:ext cx="4526280" cy="658368"/>
-          </a:xfrm>
-          <a:prstGeom prst="roundRect">
-            <a:avLst>
-              <a:gd name="adj" fmla="val 11111"/>
-            </a:avLst>
-          </a:prstGeom>
-          <a:solidFill>
-            <a:srgbClr val="0D5C63"/>
-          </a:solidFill>
-          <a:ln w="12700">
-            <a:solidFill>
-              <a:srgbClr val="0D5C63"/>
-            </a:solidFill>
-            <a:prstDash val="solid"/>
-          </a:ln>
-        </p:spPr>
       </p:sp>
       <p:sp>
         <p:nvSpPr>
@@ -5553,11 +5076,11 @@
         </p:spPr>
         <p:txBody>
           <a:bodyPr wrap="square" lIns="0" tIns="0" rIns="0" bIns="0" rtlCol="0" anchor="ctr">
-            <a:normAutofit/>
+            <a:normAutofit fontScale="85000" lnSpcReduction="20000"/>
           </a:bodyPr>
           <a:lstStyle/>
           <a:p>
-            <a:pPr algn="ctr" indent="0" marL="0">
+            <a:pPr marL="0" indent="0" algn="ctr">
               <a:buNone/>
             </a:pPr>
             <a:r>
@@ -5571,7 +5094,7 @@
             <a:endParaRPr lang="en-US" sz="1150" dirty="0"/>
           </a:p>
           <a:p>
-            <a:pPr algn="ctr" indent="0" marL="0">
+            <a:pPr marL="0" indent="0" algn="ctr">
               <a:buNone/>
             </a:pPr>
             <a:r>
@@ -5607,7 +5130,7 @@
           <a:bodyPr wrap="square" lIns="0" tIns="0" rIns="0" bIns="0" rtlCol="0" anchor="ctr"/>
           <a:lstStyle/>
           <a:p>
-            <a:pPr algn="r" indent="0" marL="0">
+            <a:pPr marL="0" indent="0" algn="r">
               <a:buNone/>
             </a:pPr>
             <a:r>
@@ -5923,4 +5446,299 @@
     </a:ext>
   </a:extLst>
 </a:theme>
+</file>
+
+<file path=ppt/theme/theme2.xml><?xml version="1.0" encoding="utf-8"?>
+<a:theme xmlns:a="http://schemas.openxmlformats.org/drawingml/2006/main" name="Office Theme">
+  <a:themeElements>
+    <a:clrScheme name="Office">
+      <a:dk1>
+        <a:sysClr val="windowText" lastClr="000000"/>
+      </a:dk1>
+      <a:lt1>
+        <a:sysClr val="window" lastClr="FFFFFF"/>
+      </a:lt1>
+      <a:dk2>
+        <a:srgbClr val="44546A"/>
+      </a:dk2>
+      <a:lt2>
+        <a:srgbClr val="E7E6E6"/>
+      </a:lt2>
+      <a:accent1>
+        <a:srgbClr val="4472C4"/>
+      </a:accent1>
+      <a:accent2>
+        <a:srgbClr val="ED7D31"/>
+      </a:accent2>
+      <a:accent3>
+        <a:srgbClr val="A5A5A5"/>
+      </a:accent3>
+      <a:accent4>
+        <a:srgbClr val="FFC000"/>
+      </a:accent4>
+      <a:accent5>
+        <a:srgbClr val="5B9BD5"/>
+      </a:accent5>
+      <a:accent6>
+        <a:srgbClr val="70AD47"/>
+      </a:accent6>
+      <a:hlink>
+        <a:srgbClr val="0563C1"/>
+      </a:hlink>
+      <a:folHlink>
+        <a:srgbClr val="954F72"/>
+      </a:folHlink>
+    </a:clrScheme>
+    <a:fontScheme name="Office">
+      <a:majorFont>
+        <a:latin typeface="Calibri Light" panose="020F0302020204030204"/>
+        <a:ea typeface=""/>
+        <a:cs typeface=""/>
+        <a:font script="Jpan" typeface="游ゴシック Light"/>
+        <a:font script="Hang" typeface="맑은 고딕"/>
+        <a:font script="Hans" typeface="等线 Light"/>
+        <a:font script="Hant" typeface="新細明體"/>
+        <a:font script="Arab" typeface="Times New Roman"/>
+        <a:font script="Hebr" typeface="Times New Roman"/>
+        <a:font script="Thai" typeface="Angsana New"/>
+        <a:font script="Ethi" typeface="Nyala"/>
+        <a:font script="Beng" typeface="Vrinda"/>
+        <a:font script="Gujr" typeface="Shruti"/>
+        <a:font script="Khmr" typeface="MoolBoran"/>
+        <a:font script="Knda" typeface="Tunga"/>
+        <a:font script="Guru" typeface="Raavi"/>
+        <a:font script="Cans" typeface="Euphemia"/>
+        <a:font script="Cher" typeface="Plantagenet Cherokee"/>
+        <a:font script="Yiii" typeface="Microsoft Yi Baiti"/>
+        <a:font script="Tibt" typeface="Microsoft Himalaya"/>
+        <a:font script="Thaa" typeface="MV Boli"/>
+        <a:font script="Deva" typeface="Mangal"/>
+        <a:font script="Telu" typeface="Gautami"/>
+        <a:font script="Taml" typeface="Latha"/>
+        <a:font script="Syrc" typeface="Estrangelo Edessa"/>
+        <a:font script="Orya" typeface="Kalinga"/>
+        <a:font script="Mlym" typeface="Kartika"/>
+        <a:font script="Laoo" typeface="DokChampa"/>
+        <a:font script="Sinh" typeface="Iskoola Pota"/>
+        <a:font script="Mong" typeface="Mongolian Baiti"/>
+        <a:font script="Viet" typeface="Times New Roman"/>
+        <a:font script="Uigh" typeface="Microsoft Uighur"/>
+        <a:font script="Geor" typeface="Sylfaen"/>
+        <a:font script="Armn" typeface="Arial"/>
+        <a:font script="Bugi" typeface="Leelawadee UI"/>
+        <a:font script="Bopo" typeface="Microsoft JhengHei"/>
+        <a:font script="Java" typeface="Javanese Text"/>
+        <a:font script="Lisu" typeface="Segoe UI"/>
+        <a:font script="Mymr" typeface="Myanmar Text"/>
+        <a:font script="Nkoo" typeface="Ebrima"/>
+        <a:font script="Olck" typeface="Nirmala UI"/>
+        <a:font script="Osma" typeface="Ebrima"/>
+        <a:font script="Phag" typeface="Phagspa"/>
+        <a:font script="Syrn" typeface="Estrangelo Edessa"/>
+        <a:font script="Syrj" typeface="Estrangelo Edessa"/>
+        <a:font script="Syre" typeface="Estrangelo Edessa"/>
+        <a:font script="Sora" typeface="Nirmala UI"/>
+        <a:font script="Tale" typeface="Microsoft Tai Le"/>
+        <a:font script="Talu" typeface="Microsoft New Tai Lue"/>
+        <a:font script="Tfng" typeface="Ebrima"/>
+      </a:majorFont>
+      <a:minorFont>
+        <a:latin typeface="Calibri" panose="020F0502020204030204"/>
+        <a:ea typeface=""/>
+        <a:cs typeface=""/>
+        <a:font script="Jpan" typeface="游ゴシック"/>
+        <a:font script="Hang" typeface="맑은 고딕"/>
+        <a:font script="Hans" typeface="等线"/>
+        <a:font script="Hant" typeface="新細明體"/>
+        <a:font script="Arab" typeface="Arial"/>
+        <a:font script="Hebr" typeface="Arial"/>
+        <a:font script="Thai" typeface="Cordia New"/>
+        <a:font script="Ethi" typeface="Nyala"/>
+        <a:font script="Beng" typeface="Vrinda"/>
+        <a:font script="Gujr" typeface="Shruti"/>
+        <a:font script="Khmr" typeface="DaunPenh"/>
+        <a:font script="Knda" typeface="Tunga"/>
+        <a:font script="Guru" typeface="Raavi"/>
+        <a:font script="Cans" typeface="Euphemia"/>
+        <a:font script="Cher" typeface="Plantagenet Cherokee"/>
+        <a:font script="Yiii" typeface="Microsoft Yi Baiti"/>
+        <a:font script="Tibt" typeface="Microsoft Himalaya"/>
+        <a:font script="Thaa" typeface="MV Boli"/>
+        <a:font script="Deva" typeface="Mangal"/>
+        <a:font script="Telu" typeface="Gautami"/>
+        <a:font script="Taml" typeface="Latha"/>
+        <a:font script="Syrc" typeface="Estrangelo Edessa"/>
+        <a:font script="Orya" typeface="Kalinga"/>
+        <a:font script="Mlym" typeface="Kartika"/>
+        <a:font script="Laoo" typeface="DokChampa"/>
+        <a:font script="Sinh" typeface="Iskoola Pota"/>
+        <a:font script="Mong" typeface="Mongolian Baiti"/>
+        <a:font script="Viet" typeface="Arial"/>
+        <a:font script="Uigh" typeface="Microsoft Uighur"/>
+        <a:font script="Geor" typeface="Sylfaen"/>
+        <a:font script="Armn" typeface="Arial"/>
+        <a:font script="Bugi" typeface="Leelawadee UI"/>
+        <a:font script="Bopo" typeface="Microsoft JhengHei"/>
+        <a:font script="Java" typeface="Javanese Text"/>
+        <a:font script="Lisu" typeface="Segoe UI"/>
+        <a:font script="Mymr" typeface="Myanmar Text"/>
+        <a:font script="Nkoo" typeface="Ebrima"/>
+        <a:font script="Olck" typeface="Nirmala UI"/>
+        <a:font script="Osma" typeface="Ebrima"/>
+        <a:font script="Phag" typeface="Phagspa"/>
+        <a:font script="Syrn" typeface="Estrangelo Edessa"/>
+        <a:font script="Syrj" typeface="Estrangelo Edessa"/>
+        <a:font script="Syre" typeface="Estrangelo Edessa"/>
+        <a:font script="Sora" typeface="Nirmala UI"/>
+        <a:font script="Tale" typeface="Microsoft Tai Le"/>
+        <a:font script="Talu" typeface="Microsoft New Tai Lue"/>
+        <a:font script="Tfng" typeface="Ebrima"/>
+      </a:minorFont>
+    </a:fontScheme>
+    <a:fmtScheme name="Office">
+      <a:fillStyleLst>
+        <a:solidFill>
+          <a:schemeClr val="phClr"/>
+        </a:solidFill>
+        <a:gradFill rotWithShape="1">
+          <a:gsLst>
+            <a:gs pos="0">
+              <a:schemeClr val="phClr">
+                <a:lumMod val="110000"/>
+                <a:satMod val="105000"/>
+                <a:tint val="67000"/>
+              </a:schemeClr>
+            </a:gs>
+            <a:gs pos="50000">
+              <a:schemeClr val="phClr">
+                <a:lumMod val="105000"/>
+                <a:satMod val="103000"/>
+                <a:tint val="73000"/>
+              </a:schemeClr>
+            </a:gs>
+            <a:gs pos="100000">
+              <a:schemeClr val="phClr">
+                <a:lumMod val="105000"/>
+                <a:satMod val="109000"/>
+                <a:tint val="81000"/>
+              </a:schemeClr>
+            </a:gs>
+          </a:gsLst>
+          <a:lin ang="5400000" scaled="0"/>
+        </a:gradFill>
+        <a:gradFill rotWithShape="1">
+          <a:gsLst>
+            <a:gs pos="0">
+              <a:schemeClr val="phClr">
+                <a:satMod val="103000"/>
+                <a:lumMod val="102000"/>
+                <a:tint val="94000"/>
+              </a:schemeClr>
+            </a:gs>
+            <a:gs pos="50000">
+              <a:schemeClr val="phClr">
+                <a:satMod val="110000"/>
+                <a:lumMod val="100000"/>
+                <a:shade val="100000"/>
+              </a:schemeClr>
+            </a:gs>
+            <a:gs pos="100000">
+              <a:schemeClr val="phClr">
+                <a:lumMod val="99000"/>
+                <a:satMod val="120000"/>
+                <a:shade val="78000"/>
+              </a:schemeClr>
+            </a:gs>
+          </a:gsLst>
+          <a:lin ang="5400000" scaled="0"/>
+        </a:gradFill>
+      </a:fillStyleLst>
+      <a:lnStyleLst>
+        <a:ln w="6350" cap="flat" cmpd="sng" algn="ctr">
+          <a:solidFill>
+            <a:schemeClr val="phClr"/>
+          </a:solidFill>
+          <a:prstDash val="solid"/>
+          <a:miter lim="800000"/>
+        </a:ln>
+        <a:ln w="12700" cap="flat" cmpd="sng" algn="ctr">
+          <a:solidFill>
+            <a:schemeClr val="phClr"/>
+          </a:solidFill>
+          <a:prstDash val="solid"/>
+          <a:miter lim="800000"/>
+        </a:ln>
+        <a:ln w="19050" cap="flat" cmpd="sng" algn="ctr">
+          <a:solidFill>
+            <a:schemeClr val="phClr"/>
+          </a:solidFill>
+          <a:prstDash val="solid"/>
+          <a:miter lim="800000"/>
+        </a:ln>
+      </a:lnStyleLst>
+      <a:effectStyleLst>
+        <a:effectStyle>
+          <a:effectLst/>
+        </a:effectStyle>
+        <a:effectStyle>
+          <a:effectLst/>
+        </a:effectStyle>
+        <a:effectStyle>
+          <a:effectLst>
+            <a:outerShdw blurRad="57150" dist="19050" dir="5400000" algn="ctr" rotWithShape="0">
+              <a:srgbClr val="000000">
+                <a:alpha val="63000"/>
+              </a:srgbClr>
+            </a:outerShdw>
+          </a:effectLst>
+        </a:effectStyle>
+      </a:effectStyleLst>
+      <a:bgFillStyleLst>
+        <a:solidFill>
+          <a:schemeClr val="phClr"/>
+        </a:solidFill>
+        <a:solidFill>
+          <a:schemeClr val="phClr">
+            <a:tint val="95000"/>
+            <a:satMod val="170000"/>
+          </a:schemeClr>
+        </a:solidFill>
+        <a:gradFill rotWithShape="1">
+          <a:gsLst>
+            <a:gs pos="0">
+              <a:schemeClr val="phClr">
+                <a:tint val="93000"/>
+                <a:satMod val="150000"/>
+                <a:shade val="98000"/>
+                <a:lumMod val="102000"/>
+              </a:schemeClr>
+            </a:gs>
+            <a:gs pos="50000">
+              <a:schemeClr val="phClr">
+                <a:tint val="98000"/>
+                <a:satMod val="130000"/>
+                <a:shade val="90000"/>
+                <a:lumMod val="103000"/>
+              </a:schemeClr>
+            </a:gs>
+            <a:gs pos="100000">
+              <a:schemeClr val="phClr">
+                <a:shade val="63000"/>
+                <a:satMod val="120000"/>
+              </a:schemeClr>
+            </a:gs>
+          </a:gsLst>
+          <a:lin ang="5400000" scaled="0"/>
+        </a:gradFill>
+      </a:bgFillStyleLst>
+    </a:fmtScheme>
+  </a:themeElements>
+  <a:objectDefaults/>
+  <a:extraClrSchemeLst/>
+  <a:extLst>
+    <a:ext uri="{05A4C25C-085E-4340-85A3-A5531E510DB2}">
+      <thm15:themeFamily xmlns:thm15="http://schemas.microsoft.com/office/thememl/2012/main" name="Office Theme" id="{62F939B6-93AF-4DB8-9C6B-D6C7DFDC589F}" vid="{4A3C46E8-61CC-4603-A589-7422A47A8E4A}"/>
+    </a:ext>
+  </a:extLst>
+</a:theme>
 </file>